--- a/Slides/Artificial Perception/Pose_Artificial_Perception_01.pptx
+++ b/Slides/Artificial Perception/Pose_Artificial_Perception_01.pptx
@@ -7906,7 +7906,7 @@
                 <a:cs typeface="Calibri"/>
                 <a:sym typeface="Calibri"/>
               </a:rPr>
-              <a:t>Pose Representation</a:t>
+              <a:t>Artificial (Visual) Perception</a:t>
             </a:r>
             <a:endParaRPr sz="8600" dirty="0">
               <a:latin typeface="Calibri"/>
@@ -7959,7 +7959,7 @@
                 <a:cs typeface="Calibri"/>
                 <a:sym typeface="Calibri"/>
               </a:rPr>
-              <a:t>Formalisms for the three Pose types and their decorations.</a:t>
+              <a:t>Our vision works in 2D but we think in 3D.</a:t>
             </a:r>
             <a:endParaRPr sz="2060" dirty="0">
               <a:latin typeface="Calibri"/>
@@ -8098,13 +8098,22 @@
               <a:buNone/>
             </a:pPr>
             <a:r>
+              <a:rPr lang="en-US" dirty="0">
+                <a:latin typeface="Calibri"/>
+                <a:ea typeface="Calibri"/>
+                <a:cs typeface="Calibri"/>
+                <a:sym typeface="Calibri"/>
+              </a:rPr>
+              <a:t>Perception</a:t>
+            </a:r>
+            <a:r>
               <a:rPr lang="en" dirty="0">
                 <a:latin typeface="Calibri"/>
                 <a:ea typeface="Calibri"/>
                 <a:cs typeface="Calibri"/>
                 <a:sym typeface="Calibri"/>
               </a:rPr>
-              <a:t>Representation-01</a:t>
+              <a:t>-01</a:t>
             </a:r>
             <a:endParaRPr dirty="0">
               <a:latin typeface="Calibri"/>
@@ -8217,13 +8226,22 @@
               <a:buNone/>
             </a:pPr>
             <a:r>
+              <a:rPr lang="en-US" dirty="0">
+                <a:latin typeface="Calibri"/>
+                <a:ea typeface="Calibri"/>
+                <a:cs typeface="Calibri"/>
+                <a:sym typeface="Calibri"/>
+              </a:rPr>
+              <a:t>Perception</a:t>
+            </a:r>
+            <a:r>
               <a:rPr lang="en" dirty="0">
                 <a:latin typeface="Calibri"/>
                 <a:ea typeface="Calibri"/>
                 <a:cs typeface="Calibri"/>
                 <a:sym typeface="Calibri"/>
               </a:rPr>
-              <a:t>Representation-01</a:t>
+              <a:t>-01</a:t>
             </a:r>
             <a:endParaRPr dirty="0">
               <a:latin typeface="Calibri"/>
@@ -8336,13 +8354,22 @@
               <a:buNone/>
             </a:pPr>
             <a:r>
+              <a:rPr lang="en-US" dirty="0">
+                <a:latin typeface="Calibri"/>
+                <a:ea typeface="Calibri"/>
+                <a:cs typeface="Calibri"/>
+                <a:sym typeface="Calibri"/>
+              </a:rPr>
+              <a:t>Perception</a:t>
+            </a:r>
+            <a:r>
               <a:rPr lang="en" dirty="0">
                 <a:latin typeface="Calibri"/>
                 <a:ea typeface="Calibri"/>
                 <a:cs typeface="Calibri"/>
                 <a:sym typeface="Calibri"/>
               </a:rPr>
-              <a:t>Representation-01</a:t>
+              <a:t>-01</a:t>
             </a:r>
             <a:endParaRPr dirty="0">
               <a:latin typeface="Calibri"/>
@@ -8455,13 +8482,22 @@
               <a:buNone/>
             </a:pPr>
             <a:r>
+              <a:rPr lang="en-US" dirty="0">
+                <a:latin typeface="Calibri"/>
+                <a:ea typeface="Calibri"/>
+                <a:cs typeface="Calibri"/>
+                <a:sym typeface="Calibri"/>
+              </a:rPr>
+              <a:t>Perception</a:t>
+            </a:r>
+            <a:r>
               <a:rPr lang="en" dirty="0">
                 <a:latin typeface="Calibri"/>
                 <a:ea typeface="Calibri"/>
                 <a:cs typeface="Calibri"/>
                 <a:sym typeface="Calibri"/>
               </a:rPr>
-              <a:t>Representation-01</a:t>
+              <a:t>-01</a:t>
             </a:r>
             <a:endParaRPr dirty="0">
               <a:latin typeface="Calibri"/>
@@ -8574,13 +8610,22 @@
               <a:buNone/>
             </a:pPr>
             <a:r>
+              <a:rPr lang="en-US" dirty="0">
+                <a:latin typeface="Calibri"/>
+                <a:ea typeface="Calibri"/>
+                <a:cs typeface="Calibri"/>
+                <a:sym typeface="Calibri"/>
+              </a:rPr>
+              <a:t>Perception</a:t>
+            </a:r>
+            <a:r>
               <a:rPr lang="en" dirty="0">
                 <a:latin typeface="Calibri"/>
                 <a:ea typeface="Calibri"/>
                 <a:cs typeface="Calibri"/>
                 <a:sym typeface="Calibri"/>
               </a:rPr>
-              <a:t>Representation-01</a:t>
+              <a:t>-01</a:t>
             </a:r>
             <a:endParaRPr dirty="0">
               <a:latin typeface="Calibri"/>
@@ -8693,13 +8738,22 @@
               <a:buNone/>
             </a:pPr>
             <a:r>
+              <a:rPr lang="en-US" dirty="0">
+                <a:latin typeface="Calibri"/>
+                <a:ea typeface="Calibri"/>
+                <a:cs typeface="Calibri"/>
+                <a:sym typeface="Calibri"/>
+              </a:rPr>
+              <a:t>Perception</a:t>
+            </a:r>
+            <a:r>
               <a:rPr lang="en" dirty="0">
                 <a:latin typeface="Calibri"/>
                 <a:ea typeface="Calibri"/>
                 <a:cs typeface="Calibri"/>
                 <a:sym typeface="Calibri"/>
               </a:rPr>
-              <a:t>Representation-01</a:t>
+              <a:t>-01</a:t>
             </a:r>
             <a:endParaRPr dirty="0">
               <a:latin typeface="Calibri"/>
@@ -8812,13 +8866,22 @@
               <a:buNone/>
             </a:pPr>
             <a:r>
+              <a:rPr lang="en-US" dirty="0">
+                <a:latin typeface="Calibri"/>
+                <a:ea typeface="Calibri"/>
+                <a:cs typeface="Calibri"/>
+                <a:sym typeface="Calibri"/>
+              </a:rPr>
+              <a:t>Perception</a:t>
+            </a:r>
+            <a:r>
               <a:rPr lang="en" dirty="0">
                 <a:latin typeface="Calibri"/>
                 <a:ea typeface="Calibri"/>
                 <a:cs typeface="Calibri"/>
                 <a:sym typeface="Calibri"/>
               </a:rPr>
-              <a:t>Representation-01</a:t>
+              <a:t>-01</a:t>
             </a:r>
             <a:endParaRPr dirty="0">
               <a:latin typeface="Calibri"/>
@@ -8931,13 +8994,22 @@
               <a:buNone/>
             </a:pPr>
             <a:r>
+              <a:rPr lang="en-US" dirty="0">
+                <a:latin typeface="Calibri"/>
+                <a:ea typeface="Calibri"/>
+                <a:cs typeface="Calibri"/>
+                <a:sym typeface="Calibri"/>
+              </a:rPr>
+              <a:t>Perception</a:t>
+            </a:r>
+            <a:r>
               <a:rPr lang="en" dirty="0">
                 <a:latin typeface="Calibri"/>
                 <a:ea typeface="Calibri"/>
                 <a:cs typeface="Calibri"/>
                 <a:sym typeface="Calibri"/>
               </a:rPr>
-              <a:t>Representation-01</a:t>
+              <a:t>-01</a:t>
             </a:r>
             <a:endParaRPr dirty="0">
               <a:latin typeface="Calibri"/>
@@ -9198,7 +9270,7 @@
                 <a:cs typeface="Calibri"/>
                 <a:sym typeface="Calibri"/>
               </a:rPr>
-              <a:t>Representation-01</a:t>
+              <a:t>Perception-01</a:t>
             </a:r>
             <a:endParaRPr dirty="0">
               <a:latin typeface="Calibri"/>
@@ -9312,7 +9384,7 @@
                 <a:cs typeface="Calibri"/>
                 <a:sym typeface="Calibri"/>
               </a:rPr>
-              <a:t>Representation-01</a:t>
+              <a:t>Perception-01</a:t>
             </a:r>
             <a:endParaRPr dirty="0">
               <a:latin typeface="Calibri"/>
@@ -9339,12 +9411,70 @@
             <p:ph type="subTitle" idx="1"/>
           </p:nvPr>
         </p:nvSpPr>
-        <p:spPr/>
+        <p:spPr>
+          <a:xfrm>
+            <a:off x="311700" y="2834124"/>
+            <a:ext cx="8520600" cy="1622675"/>
+          </a:xfrm>
+        </p:spPr>
         <p:txBody>
-          <a:bodyPr/>
+          <a:bodyPr>
+            <a:normAutofit fontScale="25000" lnSpcReduction="20000"/>
+          </a:bodyPr>
           <a:lstStyle/>
           <a:p>
-            <a:endParaRPr lang="en-US"/>
+            <a:r>
+              <a:rPr lang="en-US" sz="4000" dirty="0"/>
+              <a:t>Perception is the transformation of fragmented views of the world to an understanding of our surrounding environment.</a:t>
+            </a:r>
+          </a:p>
+          <a:p>
+            <a:r>
+              <a:rPr lang="en-US" sz="4000" dirty="0"/>
+              <a:t>These views focus the high resolution part of our vision on subjects of interest.</a:t>
+            </a:r>
+          </a:p>
+          <a:p>
+            <a:r>
+              <a:rPr lang="en-US" sz="4000" dirty="0"/>
+              <a:t>They may be discontinuous jumps, or Saccades or they may be smooth pursuits, tracking a moving subject so that it remains in the same position in our visual field.</a:t>
+            </a:r>
+          </a:p>
+          <a:p>
+            <a:r>
+              <a:rPr lang="en-US" sz="4000" dirty="0"/>
+              <a:t>So the picture is built up from still views of static things and tracked views of moving things</a:t>
+            </a:r>
+          </a:p>
+          <a:p>
+            <a:r>
+              <a:rPr lang="en-US" sz="4000" dirty="0"/>
+              <a:t>Visual velocimetry</a:t>
+            </a:r>
+          </a:p>
+          <a:p>
+            <a:r>
+              <a:rPr lang="en-US" sz="4000" dirty="0"/>
+              <a:t>Extraction of moving objects – visual velocimetry</a:t>
+            </a:r>
+          </a:p>
+          <a:p>
+            <a:r>
+              <a:rPr lang="en-US" sz="4000" dirty="0"/>
+              <a:t>Detection of subjects that fit human-interested semantic categories</a:t>
+            </a:r>
+          </a:p>
+          <a:p>
+            <a:r>
+              <a:rPr lang="en-US" sz="4000" dirty="0"/>
+              <a:t>Some things have a lot of detail but no semantic representation of detail</a:t>
+            </a:r>
+          </a:p>
+          <a:p>
+            <a:endParaRPr lang="en-US" sz="4000" dirty="0"/>
+          </a:p>
+          <a:p>
+            <a:endParaRPr lang="en-US" dirty="0"/>
           </a:p>
         </p:txBody>
       </p:sp>
@@ -9425,13 +9555,22 @@
               <a:buNone/>
             </a:pPr>
             <a:r>
+              <a:rPr lang="en-US" dirty="0">
+                <a:latin typeface="Calibri"/>
+                <a:ea typeface="Calibri"/>
+                <a:cs typeface="Calibri"/>
+                <a:sym typeface="Calibri"/>
+              </a:rPr>
+              <a:t>Perception</a:t>
+            </a:r>
+            <a:r>
               <a:rPr lang="en" dirty="0">
                 <a:latin typeface="Calibri"/>
                 <a:ea typeface="Calibri"/>
                 <a:cs typeface="Calibri"/>
                 <a:sym typeface="Calibri"/>
               </a:rPr>
-              <a:t>Representation-01</a:t>
+              <a:t>-01</a:t>
             </a:r>
             <a:endParaRPr dirty="0">
               <a:latin typeface="Calibri"/>
@@ -9544,13 +9683,22 @@
               <a:buNone/>
             </a:pPr>
             <a:r>
+              <a:rPr lang="en-US" dirty="0">
+                <a:latin typeface="Calibri"/>
+                <a:ea typeface="Calibri"/>
+                <a:cs typeface="Calibri"/>
+                <a:sym typeface="Calibri"/>
+              </a:rPr>
+              <a:t>Perception</a:t>
+            </a:r>
+            <a:r>
               <a:rPr lang="en" dirty="0">
                 <a:latin typeface="Calibri"/>
                 <a:ea typeface="Calibri"/>
                 <a:cs typeface="Calibri"/>
                 <a:sym typeface="Calibri"/>
               </a:rPr>
-              <a:t>Representation-01</a:t>
+              <a:t>-01</a:t>
             </a:r>
             <a:endParaRPr dirty="0">
               <a:latin typeface="Calibri"/>
@@ -9663,13 +9811,22 @@
               <a:buNone/>
             </a:pPr>
             <a:r>
+              <a:rPr lang="en-US" dirty="0">
+                <a:latin typeface="Calibri"/>
+                <a:ea typeface="Calibri"/>
+                <a:cs typeface="Calibri"/>
+                <a:sym typeface="Calibri"/>
+              </a:rPr>
+              <a:t>Perception</a:t>
+            </a:r>
+            <a:r>
               <a:rPr lang="en" dirty="0">
                 <a:latin typeface="Calibri"/>
                 <a:ea typeface="Calibri"/>
                 <a:cs typeface="Calibri"/>
                 <a:sym typeface="Calibri"/>
               </a:rPr>
-              <a:t>Representation-01</a:t>
+              <a:t>-01</a:t>
             </a:r>
             <a:endParaRPr dirty="0">
               <a:latin typeface="Calibri"/>
@@ -9782,13 +9939,22 @@
               <a:buNone/>
             </a:pPr>
             <a:r>
+              <a:rPr lang="en-US" dirty="0">
+                <a:latin typeface="Calibri"/>
+                <a:ea typeface="Calibri"/>
+                <a:cs typeface="Calibri"/>
+                <a:sym typeface="Calibri"/>
+              </a:rPr>
+              <a:t>Perception</a:t>
+            </a:r>
+            <a:r>
               <a:rPr lang="en" dirty="0">
                 <a:latin typeface="Calibri"/>
                 <a:ea typeface="Calibri"/>
                 <a:cs typeface="Calibri"/>
                 <a:sym typeface="Calibri"/>
               </a:rPr>
-              <a:t>Representation-01</a:t>
+              <a:t>-01</a:t>
             </a:r>
             <a:endParaRPr dirty="0">
               <a:latin typeface="Calibri"/>
@@ -9901,13 +10067,22 @@
               <a:buNone/>
             </a:pPr>
             <a:r>
+              <a:rPr lang="en-US" dirty="0">
+                <a:latin typeface="Calibri"/>
+                <a:ea typeface="Calibri"/>
+                <a:cs typeface="Calibri"/>
+                <a:sym typeface="Calibri"/>
+              </a:rPr>
+              <a:t>Perception</a:t>
+            </a:r>
+            <a:r>
               <a:rPr lang="en" dirty="0">
                 <a:latin typeface="Calibri"/>
                 <a:ea typeface="Calibri"/>
                 <a:cs typeface="Calibri"/>
                 <a:sym typeface="Calibri"/>
               </a:rPr>
-              <a:t>Representation-01</a:t>
+              <a:t>-01</a:t>
             </a:r>
             <a:endParaRPr dirty="0">
               <a:latin typeface="Calibri"/>
